--- a/atelier/atelier-s02-the-reveal.pptx
+++ b/atelier/atelier-s02-the-reveal.pptx
@@ -3773,7 +3773,7 @@
         <p:spPr>
           <a:xfrm>
             <a:off x="-2057400" y="8263830"/>
-            <a:ext cx="14401800" cy="400050"/>
+            <a:ext cx="14401800" cy="315367"/>
           </a:xfrm>
           <a:prstGeom prst="rect">
             <a:avLst/>
@@ -3784,7 +3784,11 @@
           <a:bodyPr wrap="none" anchor="t" lIns="0" rIns="0" tIns="0" bIns="0"/>
           <a:lstStyle/>
           <a:p>
-            <a:pPr algn="ctr"/>
+            <a:pPr algn="ctr">
+              <a:lnSpc>
+                <a:spcPct val="92000"/>
+              </a:lnSpc>
+            </a:pPr>
             <a:r>
               <a:rPr sz="2700" i="1" b="0">
                 <a:solidFill>
@@ -3807,7 +3811,7 @@
         </p:nvSpPr>
         <p:spPr>
           <a:xfrm>
-            <a:off x="76200" y="8987730"/>
+            <a:off x="76200" y="8903047"/>
             <a:ext cx="10134600" cy="258961"/>
           </a:xfrm>
           <a:prstGeom prst="rect">
@@ -3846,7 +3850,7 @@
         </p:nvSpPr>
         <p:spPr>
           <a:xfrm>
-            <a:off x="-2057400" y="9532441"/>
+            <a:off x="-2057400" y="9447758"/>
             <a:ext cx="14401800" cy="104775"/>
           </a:xfrm>
           <a:prstGeom prst="rect">

--- a/atelier/atelier-s02-the-reveal.pptx
+++ b/atelier/atelier-s02-the-reveal.pptx
@@ -3141,7 +3141,7 @@
         <p:spPr>
           <a:xfrm>
             <a:off x="762000" y="762000"/>
-            <a:ext cx="457200" cy="9525"/>
+            <a:ext cx="552450" cy="9525"/>
           </a:xfrm>
           <a:prstGeom prst="rect">
             <a:avLst/>
@@ -3184,8 +3184,8 @@
         </p:nvSpPr>
         <p:spPr>
           <a:xfrm>
-            <a:off x="762000" y="1209675"/>
-            <a:ext cx="457200" cy="9525"/>
+            <a:off x="762000" y="1304925"/>
+            <a:ext cx="552450" cy="9525"/>
           </a:xfrm>
           <a:prstGeom prst="rect">
             <a:avLst/>
@@ -3229,7 +3229,7 @@
         <p:spPr>
           <a:xfrm>
             <a:off x="762000" y="762000"/>
-            <a:ext cx="9525" cy="457200"/>
+            <a:ext cx="9525" cy="552450"/>
           </a:xfrm>
           <a:prstGeom prst="rect">
             <a:avLst/>
@@ -3272,8 +3272,8 @@
         </p:nvSpPr>
         <p:spPr>
           <a:xfrm>
-            <a:off x="1209675" y="762000"/>
-            <a:ext cx="9525" cy="457200"/>
+            <a:off x="1304925" y="762000"/>
+            <a:ext cx="9525" cy="552450"/>
           </a:xfrm>
           <a:prstGeom prst="rect">
             <a:avLst/>
@@ -3316,8 +3316,8 @@
         </p:nvSpPr>
         <p:spPr>
           <a:xfrm>
-            <a:off x="3990975" y="5391150"/>
-            <a:ext cx="514350" cy="19050"/>
+            <a:off x="3577679" y="5057775"/>
+            <a:ext cx="609600" cy="19050"/>
           </a:xfrm>
           <a:prstGeom prst="rect">
             <a:avLst/>
@@ -3360,8 +3360,8 @@
         </p:nvSpPr>
         <p:spPr>
           <a:xfrm>
-            <a:off x="5781526" y="5391150"/>
-            <a:ext cx="514350" cy="19050"/>
+            <a:off x="6099572" y="5057775"/>
+            <a:ext cx="609600" cy="19050"/>
           </a:xfrm>
           <a:prstGeom prst="rect">
             <a:avLst/>
@@ -3404,14 +3404,14 @@
         </p:nvSpPr>
         <p:spPr>
           <a:xfrm>
-            <a:off x="762000" y="15735300"/>
+            <a:off x="762000" y="15782925"/>
             <a:ext cx="8763000" cy="9525"/>
           </a:xfrm>
           <a:prstGeom prst="rect">
             <a:avLst/>
           </a:prstGeom>
           <a:solidFill>
-            <a:srgbClr val="524F4B"/>
+            <a:srgbClr val="595552"/>
           </a:solidFill>
           <a:ln>
             <a:noFill/>
@@ -3448,14 +3448,14 @@
         </p:nvSpPr>
         <p:spPr>
           <a:xfrm>
-            <a:off x="762000" y="16373475"/>
+            <a:off x="762000" y="16659225"/>
             <a:ext cx="8763000" cy="9525"/>
           </a:xfrm>
           <a:prstGeom prst="rect">
             <a:avLst/>
           </a:prstGeom>
           <a:solidFill>
-            <a:srgbClr val="524F4B"/>
+            <a:srgbClr val="595552"/>
           </a:solidFill>
           <a:ln>
             <a:noFill/>
@@ -3492,14 +3492,14 @@
         </p:nvSpPr>
         <p:spPr>
           <a:xfrm>
-            <a:off x="762000" y="15735300"/>
-            <a:ext cx="9525" cy="647700"/>
+            <a:off x="762000" y="15782925"/>
+            <a:ext cx="9525" cy="885825"/>
           </a:xfrm>
           <a:prstGeom prst="rect">
             <a:avLst/>
           </a:prstGeom>
           <a:solidFill>
-            <a:srgbClr val="524F4B"/>
+            <a:srgbClr val="595552"/>
           </a:solidFill>
           <a:ln>
             <a:noFill/>
@@ -3536,14 +3536,14 @@
         </p:nvSpPr>
         <p:spPr>
           <a:xfrm>
-            <a:off x="9515475" y="15735300"/>
-            <a:ext cx="9525" cy="647700"/>
+            <a:off x="9515475" y="15782925"/>
+            <a:ext cx="9525" cy="885825"/>
           </a:xfrm>
           <a:prstGeom prst="rect">
             <a:avLst/>
           </a:prstGeom>
           <a:solidFill>
-            <a:srgbClr val="524F4B"/>
+            <a:srgbClr val="595552"/>
           </a:solidFill>
           <a:ln>
             <a:noFill/>
@@ -3580,8 +3580,8 @@
         </p:nvSpPr>
         <p:spPr>
           <a:xfrm>
-            <a:off x="1024416" y="16012004"/>
-            <a:ext cx="94293" cy="94292"/>
+            <a:off x="1077621" y="16165220"/>
+            <a:ext cx="121233" cy="121234"/>
           </a:xfrm>
           <a:prstGeom prst="rect">
             <a:avLst/>
@@ -3624,8 +3624,8 @@
         </p:nvSpPr>
         <p:spPr>
           <a:xfrm>
-            <a:off x="862608" y="909638"/>
-            <a:ext cx="790575" cy="161925"/>
+            <a:off x="880170" y="938212"/>
+            <a:ext cx="886778" cy="200025"/>
           </a:xfrm>
           <a:prstGeom prst="rect">
             <a:avLst/>
@@ -3642,7 +3642,7 @@
               </a:lnSpc>
             </a:pPr>
             <a:r>
-              <a:rPr sz="1275" i="0" b="1" spc="51">
+              <a:rPr sz="1575" i="0" b="1" spc="63">
                 <a:solidFill>
                   <a:srgbClr val="FAF6F0"/>
                 </a:solidFill>
@@ -3663,8 +3663,8 @@
         </p:nvSpPr>
         <p:spPr>
           <a:xfrm>
-            <a:off x="8040588" y="938212"/>
-            <a:ext cx="2756059" cy="104775"/>
+            <a:off x="7238554" y="952500"/>
+            <a:ext cx="4039314" cy="171450"/>
           </a:xfrm>
           <a:prstGeom prst="rect">
             <a:avLst/>
@@ -3677,9 +3677,9 @@
           <a:p>
             <a:pPr algn="l"/>
             <a:r>
-              <a:rPr sz="750" i="0" b="0" spc="105">
+              <a:rPr sz="1125" i="0" b="0" spc="180">
                 <a:solidFill>
-                  <a:srgbClr val="A09D98"/>
+                  <a:srgbClr val="A5A19C"/>
                 </a:solidFill>
                 <a:latin typeface="Space Mono"/>
                 <a:ea typeface="Space Mono"/>
@@ -3698,8 +3698,8 @@
         </p:nvSpPr>
         <p:spPr>
           <a:xfrm>
-            <a:off x="4206285" y="5334000"/>
-            <a:ext cx="1874282" cy="133350"/>
+            <a:off x="3697412" y="4953000"/>
+            <a:ext cx="2892028" cy="228600"/>
           </a:xfrm>
           <a:prstGeom prst="rect">
             <a:avLst/>
@@ -3712,7 +3712,7 @@
           <a:p>
             <a:pPr algn="ctr"/>
             <a:r>
-              <a:rPr sz="900" i="0" b="1" spc="306">
+              <a:rPr sz="1575" i="0" b="1" spc="472">
                 <a:solidFill>
                   <a:srgbClr val="BC5B36"/>
                 </a:solidFill>
@@ -3733,8 +3733,8 @@
         </p:nvSpPr>
         <p:spPr>
           <a:xfrm>
-            <a:off x="-2057400" y="5753100"/>
-            <a:ext cx="14401800" cy="2453580"/>
+            <a:off x="-2057400" y="5562600"/>
+            <a:ext cx="14401800" cy="2628900"/>
           </a:xfrm>
           <a:prstGeom prst="rect">
             <a:avLst/>
@@ -3751,7 +3751,7 @@
               </a:lnSpc>
             </a:pPr>
             <a:r>
-              <a:rPr sz="21000" i="0" b="1" spc="-630">
+              <a:rPr sz="22500" i="0" b="1" spc="-675">
                 <a:solidFill>
                   <a:srgbClr val="FAF6F0"/>
                 </a:solidFill>
@@ -3772,8 +3772,8 @@
         </p:nvSpPr>
         <p:spPr>
           <a:xfrm>
-            <a:off x="-2057400" y="8263830"/>
-            <a:ext cx="14401800" cy="315367"/>
+            <a:off x="-2057400" y="8286750"/>
+            <a:ext cx="14401800" cy="420588"/>
           </a:xfrm>
           <a:prstGeom prst="rect">
             <a:avLst/>
@@ -3790,7 +3790,7 @@
               </a:lnSpc>
             </a:pPr>
             <a:r>
-              <a:rPr sz="2700" i="1" b="0">
+              <a:rPr sz="3600" i="1" b="0">
                 <a:solidFill>
                   <a:srgbClr val="BC5B36"/>
                 </a:solidFill>
@@ -3811,8 +3811,8 @@
         </p:nvSpPr>
         <p:spPr>
           <a:xfrm>
-            <a:off x="76200" y="8903047"/>
-            <a:ext cx="10134600" cy="258961"/>
+            <a:off x="-685800" y="9145488"/>
+            <a:ext cx="11658600" cy="411361"/>
           </a:xfrm>
           <a:prstGeom prst="rect">
             <a:avLst/>
@@ -3829,7 +3829,7 @@
               </a:lnSpc>
             </a:pPr>
             <a:r>
-              <a:rPr sz="1275" i="0" b="0">
+              <a:rPr sz="2025" i="0" b="0">
                 <a:solidFill>
                   <a:srgbClr val="D8D5CF"/>
                 </a:solidFill>
@@ -3850,8 +3850,8 @@
         </p:nvSpPr>
         <p:spPr>
           <a:xfrm>
-            <a:off x="-2057400" y="9447758"/>
-            <a:ext cx="14401800" cy="104775"/>
+            <a:off x="-2057400" y="9937849"/>
+            <a:ext cx="14401800" cy="180975"/>
           </a:xfrm>
           <a:prstGeom prst="rect">
             <a:avLst/>
@@ -3864,7 +3864,7 @@
           <a:p>
             <a:pPr algn="ctr"/>
             <a:r>
-              <a:rPr sz="750" i="0" b="0" spc="75">
+              <a:rPr sz="1200" i="0" b="0" spc="168">
                 <a:solidFill>
                   <a:srgbClr val="B7B3AE"/>
                 </a:solidFill>
@@ -3885,8 +3885,8 @@
         </p:nvSpPr>
         <p:spPr>
           <a:xfrm>
-            <a:off x="1238250" y="15978188"/>
-            <a:ext cx="3529251" cy="161925"/>
+            <a:off x="1333500" y="16097250"/>
+            <a:ext cx="5082064" cy="257175"/>
           </a:xfrm>
           <a:prstGeom prst="rect">
             <a:avLst/>
@@ -3899,7 +3899,7 @@
           <a:p>
             <a:pPr algn="l"/>
             <a:r>
-              <a:rPr sz="1125" i="0" b="1" spc="135">
+              <a:rPr sz="1725" i="0" b="1" spc="172">
                 <a:solidFill>
                   <a:srgbClr val="FAF6F0"/>
                 </a:solidFill>
@@ -3920,8 +3920,8 @@
         </p:nvSpPr>
         <p:spPr>
           <a:xfrm>
-            <a:off x="9105900" y="15954375"/>
-            <a:ext cx="609600" cy="209550"/>
+            <a:off x="8982075" y="16078200"/>
+            <a:ext cx="716280" cy="295275"/>
           </a:xfrm>
           <a:prstGeom prst="rect">
             <a:avLst/>
@@ -3934,7 +3934,7 @@
           <a:p>
             <a:pPr algn="l"/>
             <a:r>
-              <a:rPr sz="1350" i="0" b="0">
+              <a:rPr sz="1950" i="0" b="0">
                 <a:solidFill>
                   <a:srgbClr val="BC5B36"/>
                 </a:solidFill>
@@ -3955,8 +3955,8 @@
         </p:nvSpPr>
         <p:spPr>
           <a:xfrm>
-            <a:off x="2801585" y="17297400"/>
-            <a:ext cx="4683681" cy="123825"/>
+            <a:off x="1823799" y="17192625"/>
+            <a:ext cx="6639401" cy="180975"/>
           </a:xfrm>
           <a:prstGeom prst="rect">
             <a:avLst/>
@@ -3969,9 +3969,9 @@
           <a:p>
             <a:pPr algn="ctr"/>
             <a:r>
-              <a:rPr sz="825" i="0" b="0" spc="165">
+              <a:rPr sz="1200" i="0" b="0" spc="240">
                 <a:solidFill>
-                  <a:srgbClr val="B7B3AE"/>
+                  <a:srgbClr val="BBB8B2"/>
                 </a:solidFill>
                 <a:latin typeface="Space Mono"/>
                 <a:ea typeface="Space Mono"/>

--- a/atelier/atelier-s02-the-reveal.pptx
+++ b/atelier/atelier-s02-the-reveal.pptx
@@ -3316,7 +3316,7 @@
         </p:nvSpPr>
         <p:spPr>
           <a:xfrm>
-            <a:off x="3577679" y="5057775"/>
+            <a:off x="3557141" y="5067300"/>
             <a:ext cx="609600" cy="19050"/>
           </a:xfrm>
           <a:prstGeom prst="rect">
@@ -3360,7 +3360,7 @@
         </p:nvSpPr>
         <p:spPr>
           <a:xfrm>
-            <a:off x="6099572" y="5057775"/>
+            <a:off x="6120110" y="5067300"/>
             <a:ext cx="609600" cy="19050"/>
           </a:xfrm>
           <a:prstGeom prst="rect">
@@ -3663,8 +3663,8 @@
         </p:nvSpPr>
         <p:spPr>
           <a:xfrm>
-            <a:off x="7238554" y="952500"/>
-            <a:ext cx="4039314" cy="171450"/>
+            <a:off x="6704856" y="933450"/>
+            <a:ext cx="4893231" cy="209550"/>
           </a:xfrm>
           <a:prstGeom prst="rect">
             <a:avLst/>
@@ -3677,7 +3677,7 @@
           <a:p>
             <a:pPr algn="l"/>
             <a:r>
-              <a:rPr sz="1125" i="0" b="0" spc="180">
+              <a:rPr sz="1425" i="0" b="0" spc="199">
                 <a:solidFill>
                   <a:srgbClr val="A5A19C"/>
                 </a:solidFill>
@@ -3698,8 +3698,8 @@
         </p:nvSpPr>
         <p:spPr>
           <a:xfrm>
-            <a:off x="3697412" y="4953000"/>
-            <a:ext cx="2892028" cy="228600"/>
+            <a:off x="3664550" y="4953000"/>
+            <a:ext cx="2957751" cy="247650"/>
           </a:xfrm>
           <a:prstGeom prst="rect">
             <a:avLst/>
@@ -3712,7 +3712,7 @@
           <a:p>
             <a:pPr algn="ctr"/>
             <a:r>
-              <a:rPr sz="1575" i="0" b="1" spc="472">
+              <a:rPr sz="1650" i="0" b="1" spc="462">
                 <a:solidFill>
                   <a:srgbClr val="BC5B36"/>
                 </a:solidFill>
@@ -3733,7 +3733,7 @@
         </p:nvSpPr>
         <p:spPr>
           <a:xfrm>
-            <a:off x="-2057400" y="5562600"/>
+            <a:off x="-2057400" y="5581650"/>
             <a:ext cx="14401800" cy="2628900"/>
           </a:xfrm>
           <a:prstGeom prst="rect">
@@ -3772,7 +3772,7 @@
         </p:nvSpPr>
         <p:spPr>
           <a:xfrm>
-            <a:off x="-2057400" y="8286750"/>
+            <a:off x="-2057400" y="8305800"/>
             <a:ext cx="14401800" cy="420588"/>
           </a:xfrm>
           <a:prstGeom prst="rect">
@@ -3811,7 +3811,7 @@
         </p:nvSpPr>
         <p:spPr>
           <a:xfrm>
-            <a:off x="-685800" y="9145488"/>
+            <a:off x="-685800" y="9164538"/>
             <a:ext cx="11658600" cy="411361"/>
           </a:xfrm>
           <a:prstGeom prst="rect">
@@ -3850,8 +3850,8 @@
         </p:nvSpPr>
         <p:spPr>
           <a:xfrm>
-            <a:off x="-2057400" y="9937849"/>
-            <a:ext cx="14401800" cy="180975"/>
+            <a:off x="-2057400" y="9956899"/>
+            <a:ext cx="14401800" cy="209550"/>
           </a:xfrm>
           <a:prstGeom prst="rect">
             <a:avLst/>
@@ -3864,7 +3864,7 @@
           <a:p>
             <a:pPr algn="ctr"/>
             <a:r>
-              <a:rPr sz="1200" i="0" b="0" spc="168">
+              <a:rPr sz="1425" i="0" b="0" spc="170">
                 <a:solidFill>
                   <a:srgbClr val="B7B3AE"/>
                 </a:solidFill>
@@ -3885,8 +3885,8 @@
         </p:nvSpPr>
         <p:spPr>
           <a:xfrm>
-            <a:off x="1333500" y="16097250"/>
-            <a:ext cx="5082064" cy="257175"/>
+            <a:off x="1333500" y="16078200"/>
+            <a:ext cx="5751433" cy="295275"/>
           </a:xfrm>
           <a:prstGeom prst="rect">
             <a:avLst/>
@@ -3899,7 +3899,7 @@
           <a:p>
             <a:pPr algn="l"/>
             <a:r>
-              <a:rPr sz="1725" i="0" b="1" spc="172">
+              <a:rPr sz="2025" i="0" b="1" spc="162">
                 <a:solidFill>
                   <a:srgbClr val="FAF6F0"/>
                 </a:solidFill>
@@ -3955,8 +3955,8 @@
         </p:nvSpPr>
         <p:spPr>
           <a:xfrm>
-            <a:off x="1823799" y="17192625"/>
-            <a:ext cx="6639401" cy="180975"/>
+            <a:off x="1329690" y="17164050"/>
+            <a:ext cx="7627620" cy="209550"/>
           </a:xfrm>
           <a:prstGeom prst="rect">
             <a:avLst/>
@@ -3969,7 +3969,7 @@
           <a:p>
             <a:pPr algn="ctr"/>
             <a:r>
-              <a:rPr sz="1200" i="0" b="0" spc="240">
+              <a:rPr sz="1425" i="0" b="0" spc="256">
                 <a:solidFill>
                   <a:srgbClr val="BBB8B2"/>
                 </a:solidFill>
